--- a/assets/pptx/catalog-187.pptx
+++ b/assets/pptx/catalog-187.pptx
@@ -3268,7 +3268,7 @@
                 <a:ea typeface="Ebrima"/>
                 <a:cs typeface="Ebrima"/>
               </a:rPr>
-              <a:t>የእኔ አምላክ ነው እርሱማ እግዚአብሔር (2x)</a:t>
+              <a:t>የእኔ አምላክ ነው እርሱማ እግዚአብሔር 2x</a:t>
             </a:r>
           </a:p>
         </p:txBody>
@@ -3335,7 +3335,7 @@
                 <a:ea typeface="Ebrima"/>
                 <a:cs typeface="Ebrima"/>
               </a:rPr>
-              <a:t>የእኔ አምላክ ነው እርሱማ እግዚአብሔር (2x)</a:t>
+              <a:t>የእኔ አምላክ ነው እርሱማ እግዚአብሔር 2x</a:t>
             </a:r>
           </a:p>
         </p:txBody>
@@ -3456,7 +3456,7 @@
                 <a:ea typeface="Ebrima"/>
                 <a:cs typeface="Ebrima"/>
               </a:rPr>
-              <a:t>እርሱማ የእኔ ጌታ ነው (2x)</a:t>
+              <a:t>እርሱማ የእኔ ጌታ ነው 2x</a:t>
             </a:r>
           </a:p>
         </p:txBody>
@@ -3559,7 +3559,7 @@
                 <a:ea typeface="Ebrima"/>
                 <a:cs typeface="Ebrima"/>
               </a:rPr>
-              <a:t>እርሱማ የእኔ ጌታ ነው (2x)</a:t>
+              <a:t>እርሱማ የእኔ ጌታ ነው 2x</a:t>
             </a:r>
           </a:p>
           <a:p>
@@ -3613,7 +3613,7 @@
                 <a:ea typeface="Ebrima"/>
                 <a:cs typeface="Ebrima"/>
               </a:rPr>
-              <a:t>እርሱማ የእኔ ጌታ ነው (2x)</a:t>
+              <a:t>እርሱማ የእኔ ጌታ ነው 2x</a:t>
             </a:r>
           </a:p>
         </p:txBody>
@@ -3698,7 +3698,7 @@
                 <a:ea typeface="Ebrima"/>
                 <a:cs typeface="Ebrima"/>
               </a:rPr>
-              <a:t>የአለቆች ጌታ የመሪዎች ጌታ የብርቱዎች ጌታ (2x)</a:t>
+              <a:t>የአለቆች ጌታ የመሪዎች ጌታ የብርቱዎች ጌታ 2x</a:t>
             </a:r>
           </a:p>
         </p:txBody>
@@ -3783,7 +3783,7 @@
                 <a:ea typeface="Ebrima"/>
                 <a:cs typeface="Ebrima"/>
               </a:rPr>
-              <a:t>የእኔ አምላክ ነው እርሱማ እግዚአብሔር (2x)</a:t>
+              <a:t>የእኔ አምላክ ነው እርሱማ እግዚአብሔር 2x</a:t>
             </a:r>
           </a:p>
         </p:txBody>
@@ -3850,7 +3850,7 @@
                 <a:ea typeface="Ebrima"/>
                 <a:cs typeface="Ebrima"/>
               </a:rPr>
-              <a:t>የእኔ አምላክ ነው እርሱማ እግዚአብሔር (2x)</a:t>
+              <a:t>የእኔ አምላክ ነው እርሱማ እግዚአብሔር 2x</a:t>
             </a:r>
           </a:p>
         </p:txBody>
@@ -3971,7 +3971,7 @@
                 <a:ea typeface="Ebrima"/>
                 <a:cs typeface="Ebrima"/>
               </a:rPr>
-              <a:t>እርሱማ የእኔ ጌታ ነው (2x)</a:t>
+              <a:t>እርሱማ የእኔ ጌታ ነው 2x</a:t>
             </a:r>
           </a:p>
         </p:txBody>
@@ -4074,7 +4074,7 @@
                 <a:ea typeface="Ebrima"/>
                 <a:cs typeface="Ebrima"/>
               </a:rPr>
-              <a:t>እርሱማ የእኔ ጌታ ነው (2x)</a:t>
+              <a:t>እርሱማ የእኔ ጌታ ነው 2x</a:t>
             </a:r>
           </a:p>
           <a:p>
@@ -4128,7 +4128,7 @@
                 <a:ea typeface="Ebrima"/>
                 <a:cs typeface="Ebrima"/>
               </a:rPr>
-              <a:t>እርሱማ የእኔ ጌታ ነው (2x)</a:t>
+              <a:t>እርሱማ የእኔ ጌታ ነው 2x</a:t>
             </a:r>
           </a:p>
         </p:txBody>
@@ -4213,7 +4213,7 @@
                 <a:ea typeface="Ebrima"/>
                 <a:cs typeface="Ebrima"/>
               </a:rPr>
-              <a:t>የአለቆች ጌታ የመሪዎች ጌታ የብርቱዎች ጌታ (2x)</a:t>
+              <a:t>የአለቆች ጌታ የመሪዎች ጌታ የብርቱዎች ጌታ 2x</a:t>
             </a:r>
           </a:p>
         </p:txBody>
